--- a/02-testing.pptx
+++ b/02-testing.pptx
@@ -268,7 +268,7 @@
               <a:rPr lang="en-US" smtClean="0">
                 <a:latin typeface="Segoe UI" pitchFamily="34" charset="0"/>
               </a:rPr>
-              <a:t>11/8/2022 9:42 AM</a:t>
+              <a:t>5/24/26 9:15 PM</a:t>
             </a:fld>
             <a:endParaRPr lang="en-US" dirty="0">
               <a:latin typeface="Segoe UI" pitchFamily="34" charset="0"/>
@@ -565,7 +565,7 @@
           <a:p>
             <a:fld id="{D18B56EA-E28F-4F92-9F16-7A6F2501B303}" type="datetime8">
               <a:rPr lang="en-US" smtClean="0"/>
-              <a:t>11/8/2022 9:42 AM</a:t>
+              <a:t>5/24/26 9:14 PM</a:t>
             </a:fld>
             <a:endParaRPr lang="en-US" dirty="0"/>
           </a:p>
@@ -948,7 +948,7 @@
           <a:p>
             <a:fld id="{D18B56EA-E28F-4F92-9F16-7A6F2501B303}" type="datetime8">
               <a:rPr lang="en-US" smtClean="0"/>
-              <a:t>11/8/2022 9:42 AM</a:t>
+              <a:t>5/24/26 9:14 PM</a:t>
             </a:fld>
             <a:endParaRPr lang="en-US" dirty="0"/>
           </a:p>
@@ -1129,7 +1129,7 @@
           <a:p>
             <a:fld id="{D18B56EA-E28F-4F92-9F16-7A6F2501B303}" type="datetime8">
               <a:rPr lang="en-US" smtClean="0"/>
-              <a:t>11/8/2022 9:42 AM</a:t>
+              <a:t>5/24/26 9:14 PM</a:t>
             </a:fld>
             <a:endParaRPr lang="en-US" dirty="0"/>
           </a:p>
@@ -1310,7 +1310,7 @@
           <a:p>
             <a:fld id="{D18B56EA-E28F-4F92-9F16-7A6F2501B303}" type="datetime8">
               <a:rPr lang="en-US" smtClean="0"/>
-              <a:t>11/8/2022 9:42 AM</a:t>
+              <a:t>5/24/26 9:14 PM</a:t>
             </a:fld>
             <a:endParaRPr lang="en-US" dirty="0"/>
           </a:p>
@@ -1491,7 +1491,7 @@
           <a:p>
             <a:fld id="{D18B56EA-E28F-4F92-9F16-7A6F2501B303}" type="datetime8">
               <a:rPr lang="en-US" smtClean="0"/>
-              <a:t>11/8/2022 9:42 AM</a:t>
+              <a:t>5/24/26 9:14 PM</a:t>
             </a:fld>
             <a:endParaRPr lang="en-US" dirty="0"/>
           </a:p>
@@ -1703,7 +1703,7 @@
           <a:p>
             <a:fld id="{D18B56EA-E28F-4F92-9F16-7A6F2501B303}" type="datetime8">
               <a:rPr lang="en-US" smtClean="0"/>
-              <a:t>11/8/2022 9:42 AM</a:t>
+              <a:t>5/24/26 9:14 PM</a:t>
             </a:fld>
             <a:endParaRPr lang="en-US" dirty="0"/>
           </a:p>
@@ -1891,7 +1891,7 @@
           <a:p>
             <a:fld id="{D18B56EA-E28F-4F92-9F16-7A6F2501B303}" type="datetime8">
               <a:rPr lang="en-US" smtClean="0"/>
-              <a:t>11/8/2022 9:42 AM</a:t>
+              <a:t>5/24/26 9:14 PM</a:t>
             </a:fld>
             <a:endParaRPr lang="en-US" dirty="0"/>
           </a:p>
@@ -2124,7 +2124,7 @@
           <a:p>
             <a:fld id="{D18B56EA-E28F-4F92-9F16-7A6F2501B303}" type="datetime8">
               <a:rPr lang="en-US" smtClean="0"/>
-              <a:t>11/8/2022 9:42 AM</a:t>
+              <a:t>5/24/26 9:14 PM</a:t>
             </a:fld>
             <a:endParaRPr lang="en-US" dirty="0"/>
           </a:p>
@@ -2213,7 +2213,7 @@
           <a:p>
             <a:r>
               <a:rPr lang="en-US" dirty="0"/>
-              <a:t>The gulp **serve** task used to start the local web server monitors your SharePoint Framework project's codebase while you're testing web parts in the workbench. When a file is changed and saved, the gulp task will rebuild the project.</a:t>
+              <a:t>The heft **start** task used to start the local web server monitors your SharePoint Framework project's codebase while you're testing web parts in the workbench. When a file is changed and saved, the heft task will rebuild the project.</a:t>
             </a:r>
           </a:p>
           <a:p>
@@ -2246,7 +2246,7 @@
           <a:p>
             <a:r>
               <a:rPr lang="en-US" dirty="0"/>
-              <a:t>gulp serve</a:t>
+              <a:t>heft start</a:t>
             </a:r>
           </a:p>
           <a:p>
@@ -2261,7 +2261,7 @@
           <a:p>
             <a:r>
               <a:rPr lang="en-US" dirty="0"/>
-              <a:t>This command will run the **build** and **bundle** tasks, start the local web server, launch the default browser, and load the workbench page at the URL configured in **</a:t>
+              <a:t>This command will run the **start** tasks, start the local web server, launch the default browser, and load the workbench page at the URL configured in **</a:t>
             </a:r>
             <a:r>
               <a:rPr lang="en-US" dirty="0" err="1"/>
@@ -2292,7 +2292,7 @@
           <a:p>
             <a:r>
               <a:rPr lang="en-US" dirty="0"/>
-              <a:t>gulp serve --</a:t>
+              <a:t>heft start --</a:t>
             </a:r>
             <a:r>
               <a:rPr lang="en-US" dirty="0" err="1"/>
@@ -2402,7 +2402,7 @@
           <a:p>
             <a:fld id="{D18B56EA-E28F-4F92-9F16-7A6F2501B303}" type="datetime8">
               <a:rPr lang="en-US" smtClean="0"/>
-              <a:t>11/8/2022 9:42 AM</a:t>
+              <a:t>5/24/26 9:14 PM</a:t>
             </a:fld>
             <a:endParaRPr lang="en-US" dirty="0"/>
           </a:p>
@@ -2618,7 +2618,7 @@
           <a:p>
             <a:fld id="{D18B56EA-E28F-4F92-9F16-7A6F2501B303}" type="datetime8">
               <a:rPr lang="en-US" smtClean="0"/>
-              <a:t>11/8/2022 9:42 AM</a:t>
+              <a:t>5/24/26 9:14 PM</a:t>
             </a:fld>
             <a:endParaRPr lang="en-US" dirty="0"/>
           </a:p>
@@ -3067,7 +3067,7 @@
           <a:p>
             <a:fld id="{D18B56EA-E28F-4F92-9F16-7A6F2501B303}" type="datetime8">
               <a:rPr lang="en-US" smtClean="0"/>
-              <a:t>11/8/2022 9:42 AM</a:t>
+              <a:t>5/24/26 9:14 PM</a:t>
             </a:fld>
             <a:endParaRPr lang="en-US" dirty="0"/>
           </a:p>
@@ -3290,7 +3290,7 @@
           <a:p>
             <a:fld id="{D18B56EA-E28F-4F92-9F16-7A6F2501B303}" type="datetime8">
               <a:rPr lang="en-US" smtClean="0"/>
-              <a:t>11/8/2022 9:42 AM</a:t>
+              <a:t>5/24/26 9:14 PM</a:t>
             </a:fld>
             <a:endParaRPr lang="en-US" dirty="0"/>
           </a:p>
@@ -3471,7 +3471,7 @@
           <a:p>
             <a:fld id="{D18B56EA-E28F-4F92-9F16-7A6F2501B303}" type="datetime8">
               <a:rPr lang="en-US" smtClean="0"/>
-              <a:t>11/8/2022 9:42 AM</a:t>
+              <a:t>5/24/26 9:14 PM</a:t>
             </a:fld>
             <a:endParaRPr lang="en-US" dirty="0"/>
           </a:p>
@@ -17865,7 +17865,7 @@
               </a:spcAft>
             </a:pPr>
             <a:r>
-              <a:rPr lang="en-US" sz="2000">
+              <a:rPr lang="en-US" sz="2000" dirty="0">
                 <a:gradFill>
                   <a:gsLst>
                     <a:gs pos="0">
@@ -17879,9 +17879,9 @@
                 </a:gradFill>
                 <a:latin typeface="Consolas" panose="020B0609020204030204" pitchFamily="49" charset="0"/>
               </a:rPr>
-              <a:t>&gt; gulp serve</a:t>
-            </a:r>
-            <a:endParaRPr lang="fi-FI" sz="2000">
+              <a:t>&gt; heft start</a:t>
+            </a:r>
+            <a:endParaRPr lang="fi-FI" sz="2000" dirty="0">
               <a:gradFill>
                 <a:gsLst>
                   <a:gs pos="0">
@@ -17954,7 +17954,7 @@
               </a:spcAft>
             </a:pPr>
             <a:r>
-              <a:rPr lang="en-US" sz="2000">
+              <a:rPr lang="en-US" sz="2000" dirty="0">
                 <a:gradFill>
                   <a:gsLst>
                     <a:gs pos="0">
@@ -17968,10 +17968,10 @@
                 </a:gradFill>
                 <a:latin typeface="Consolas" panose="020B0609020204030204" pitchFamily="49" charset="0"/>
               </a:rPr>
-              <a:t>&gt; gulp serve --</a:t>
-            </a:r>
-            <a:r>
-              <a:rPr lang="en-US" sz="2000" err="1">
+              <a:t>&gt; heft start --</a:t>
+            </a:r>
+            <a:r>
+              <a:rPr lang="en-US" sz="2000" dirty="0" err="1">
                 <a:gradFill>
                   <a:gsLst>
                     <a:gs pos="0">
@@ -17987,7 +17987,7 @@
               </a:rPr>
               <a:t>nobrowser</a:t>
             </a:r>
-            <a:endParaRPr lang="fi-FI" sz="2000">
+            <a:endParaRPr lang="fi-FI" sz="2000" dirty="0">
               <a:gradFill>
                 <a:gsLst>
                   <a:gs pos="0">
@@ -18004,30 +18004,6 @@
           </a:p>
         </p:txBody>
       </p:sp>
-      <p:pic>
-        <p:nvPicPr>
-          <p:cNvPr id="6" name="Picture 5"/>
-          <p:cNvPicPr>
-            <a:picLocks noChangeAspect="1"/>
-          </p:cNvPicPr>
-          <p:nvPr/>
-        </p:nvPicPr>
-        <p:blipFill>
-          <a:blip r:embed="rId3"/>
-          <a:stretch>
-            <a:fillRect/>
-          </a:stretch>
-        </p:blipFill>
-        <p:spPr>
-          <a:xfrm>
-            <a:off x="10970765" y="3929310"/>
-            <a:ext cx="990600" cy="2226188"/>
-          </a:xfrm>
-          <a:prstGeom prst="rect">
-            <a:avLst/>
-          </a:prstGeom>
-        </p:spPr>
-      </p:pic>
     </p:spTree>
     <p:extLst>
       <p:ext uri="{BB962C8B-B14F-4D97-AF65-F5344CB8AC3E}">
@@ -18041,92 +18017,6 @@
   <p:transition>
     <p:fade/>
   </p:transition>
-  <p:timing>
-    <p:tnLst>
-      <p:par>
-        <p:cTn id="1" dur="indefinite" restart="never" nodeType="tmRoot">
-          <p:childTnLst>
-            <p:seq concurrent="1" nextAc="seek">
-              <p:cTn id="2" dur="indefinite" nodeType="mainSeq">
-                <p:childTnLst>
-                  <p:par>
-                    <p:cTn id="3" fill="hold">
-                      <p:stCondLst>
-                        <p:cond delay="indefinite"/>
-                        <p:cond evt="onBegin" delay="0">
-                          <p:tn val="2"/>
-                        </p:cond>
-                      </p:stCondLst>
-                      <p:childTnLst>
-                        <p:par>
-                          <p:cTn id="4" fill="hold">
-                            <p:stCondLst>
-                              <p:cond delay="0"/>
-                            </p:stCondLst>
-                            <p:childTnLst>
-                              <p:par>
-                                <p:cTn id="5" presetID="10" presetClass="entr" presetSubtype="0" fill="hold" nodeType="afterEffect">
-                                  <p:stCondLst>
-                                    <p:cond delay="250"/>
-                                  </p:stCondLst>
-                                  <p:childTnLst>
-                                    <p:set>
-                                      <p:cBhvr>
-                                        <p:cTn id="6" dur="1" fill="hold">
-                                          <p:stCondLst>
-                                            <p:cond delay="0"/>
-                                          </p:stCondLst>
-                                        </p:cTn>
-                                        <p:tgtEl>
-                                          <p:spTgt spid="6"/>
-                                        </p:tgtEl>
-                                        <p:attrNameLst>
-                                          <p:attrName>style.visibility</p:attrName>
-                                        </p:attrNameLst>
-                                      </p:cBhvr>
-                                      <p:to>
-                                        <p:strVal val="visible"/>
-                                      </p:to>
-                                    </p:set>
-                                    <p:animEffect transition="in" filter="fade">
-                                      <p:cBhvr>
-                                        <p:cTn id="7" dur="500"/>
-                                        <p:tgtEl>
-                                          <p:spTgt spid="6"/>
-                                        </p:tgtEl>
-                                      </p:cBhvr>
-                                    </p:animEffect>
-                                  </p:childTnLst>
-                                </p:cTn>
-                              </p:par>
-                            </p:childTnLst>
-                          </p:cTn>
-                        </p:par>
-                      </p:childTnLst>
-                    </p:cTn>
-                  </p:par>
-                </p:childTnLst>
-              </p:cTn>
-              <p:prevCondLst>
-                <p:cond evt="onPrev" delay="0">
-                  <p:tgtEl>
-                    <p:sldTgt/>
-                  </p:tgtEl>
-                </p:cond>
-              </p:prevCondLst>
-              <p:nextCondLst>
-                <p:cond evt="onNext" delay="0">
-                  <p:tgtEl>
-                    <p:sldTgt/>
-                  </p:tgtEl>
-                </p:cond>
-              </p:nextCondLst>
-            </p:seq>
-          </p:childTnLst>
-        </p:cTn>
-      </p:par>
-    </p:tnLst>
-  </p:timing>
 </p:sld>
 </file>
 
